--- a/public/fun/pack/pptx/reviewpro/보장점검양식프리미엄_46_본인점검_로즈쿼츠.pptx
+++ b/public/fun/pack/pptx/reviewpro/보장점검양식프리미엄_46_본인점검_로즈쿼츠.pptx
@@ -112,12 +112,12 @@
   <p:extLst>
     <p:ext uri="{521415D9-36F7-43E2-AB2F-B90AF26B5E84}">
       <p14:sectionLst xmlns:p14="http://schemas.microsoft.com/office/powerpoint/2010/main">
-        <p14:section name="시작" id="{48307BC5-808E-44E1-985B-7A49C67AB1B4}">
+        <p14:section name="시작" id="{EBCF7F71-D5FC-4C1D-B553-DBCA931C7967}">
           <p14:sldIdLst>
             <p14:sldId id="256"/>
           </p14:sldIdLst>
         </p14:section>
-        <p14:section name="본문" id="{505FCB98-0B74-461C-B92D-172E9A75FE59}">
+        <p14:section name="본문" id="{149168AD-2C9C-411A-96B5-C9C18FD5E4CF}">
           <p14:sldIdLst>
             <p14:sldId id="257"/>
             <p14:sldId id="258"/>
@@ -1592,7 +1592,7 @@
             </a:lvl1pPr>
           </a:lstStyle>
           <a:p>
-            <a:fld id="{2DB01ED2-BE3C-4EDD-BA64-CBFCAC3CF822}" type="slidenum">
+            <a:fld id="{B8DE6BDF-E5E4-4B41-A5F5-89F37D475E36}" type="slidenum">
               <a:rPr lang="en-US"/>
               <a:t>‹#›</a:t>
             </a:fld>
@@ -2216,7 +2216,7 @@
             </a:lvl1pPr>
           </a:lstStyle>
           <a:p>
-            <a:fld id="{EA023360-4768-440E-A5B2-7FDCB58FC937}" type="slidenum">
+            <a:fld id="{1544E92A-7BB9-4E42-A9CA-5A5CDD06DDB4}" type="slidenum">
               <a:rPr lang="en-US"/>
               <a:t>‹#›</a:t>
             </a:fld>
@@ -2805,7 +2805,7 @@
             </a:lvl1pPr>
           </a:lstStyle>
           <a:p>
-            <a:fld id="{E21C1330-41CE-4283-B83F-587204B5A3A0}" type="slidenum">
+            <a:fld id="{930CD92E-8BAB-48A5-AFE6-2D75996ED5A7}" type="slidenum">
               <a:rPr lang="en-US"/>
               <a:t>‹#›</a:t>
             </a:fld>
@@ -3608,7 +3608,7 @@
           <a:p>
             <a:r>
               <a:rPr lang="ko-KR"/>
-              <a:t>본인 점검 · 0000. 00. 00</a:t>
+              <a:t>본인 점검 · 날짜 입력</a:t>
             </a:r>
           </a:p>
           <a:p>
@@ -3699,7 +3699,7 @@
           <a:bodyPr/>
           <a:lstStyle/>
           <a:p>
-            <a:fld id="{29EC9BE5-5545-439C-9D43-4241A13DC98C}" type="slidenum">
+            <a:fld id="{F2B3E4BE-D92C-414A-8AC4-E55E88564013}" type="slidenum">
               <a:rPr lang="en-US"/>
               <a:t>‹#›</a:t>
             </a:fld>
@@ -4215,7 +4215,7 @@
           <a:bodyPr/>
           <a:lstStyle/>
           <a:p>
-            <a:fld id="{FC9BEE82-61F3-4E69-92D3-A4B9AC3DE53D}" type="slidenum">
+            <a:fld id="{70FA3F7A-039A-4042-A92C-A7426ADDEEEE}" type="slidenum">
               <a:rPr lang="en-US"/>
               <a:t>‹#›</a:t>
             </a:fld>
@@ -5721,7 +5721,7 @@
           <a:bodyPr/>
           <a:lstStyle/>
           <a:p>
-            <a:fld id="{1BBABD3B-9CED-4D8D-AE8C-EEEF780F2129}" type="slidenum">
+            <a:fld id="{C3933603-727A-4656-832A-79F0C771A82D}" type="slidenum">
               <a:rPr lang="en-US"/>
               <a:t>‹#›</a:t>
             </a:fld>
@@ -7271,7 +7271,7 @@
           <a:bodyPr/>
           <a:lstStyle/>
           <a:p>
-            <a:fld id="{77F89B99-C943-45C1-B4A2-5D7B2DB5AD5A}" type="slidenum">
+            <a:fld id="{7CB861AF-945A-48BE-8F2F-4BC4265D1926}" type="slidenum">
               <a:rPr lang="en-US"/>
               <a:t>‹#›</a:t>
             </a:fld>
@@ -8253,7 +8253,7 @@
           <a:bodyPr/>
           <a:lstStyle/>
           <a:p>
-            <a:fld id="{7D71D6BA-BD7B-4F93-A2BD-1DD8CE60EBB0}" type="slidenum">
+            <a:fld id="{C7F4BB86-F325-4940-9B4A-842BFC8F33E3}" type="slidenum">
               <a:rPr lang="en-US"/>
               <a:t>‹#›</a:t>
             </a:fld>
